--- a/proposal/올더베러_액션플랜_견적서_편집용.pptx
+++ b/proposal/올더베러_액션플랜_견적서_편집용.pptx
@@ -3629,7 +3629,7 @@
                           </a:solidFill>
                           <a:latin typeface="맑은 고딕"/>
                         </a:rPr>
-                        <a:t>인스타·유튜브 80만</a:t>
+                        <a:t>800,000 원</a:t>
                       </a:r>
                     </a:p>
                   </a:txBody>
@@ -3827,7 +3827,7 @@
                           </a:solidFill>
                           <a:latin typeface="맑은 고딕"/>
                         </a:rPr>
-                        <a:t>40만</a:t>
+                        <a:t>400,000 원</a:t>
                       </a:r>
                     </a:p>
                   </a:txBody>
@@ -4025,7 +4025,7 @@
                           </a:solidFill>
                           <a:latin typeface="맑은 고딕"/>
                         </a:rPr>
-                        <a:t>25만</a:t>
+                        <a:t>250,000 원</a:t>
                       </a:r>
                     </a:p>
                   </a:txBody>
@@ -4223,7 +4223,7 @@
                           </a:solidFill>
                           <a:latin typeface="맑은 고딕"/>
                         </a:rPr>
-                        <a:t>10만 상당·자체 0</a:t>
+                        <a:t>100,000 원</a:t>
                       </a:r>
                     </a:p>
                   </a:txBody>
@@ -4421,7 +4421,7 @@
                           </a:solidFill>
                           <a:latin typeface="맑은 고딕"/>
                         </a:rPr>
-                        <a:t>50만</a:t>
+                        <a:t>500,000 원</a:t>
                       </a:r>
                     </a:p>
                   </a:txBody>
@@ -4700,7 +4700,7 @@
                           </a:solidFill>
                           <a:latin typeface="맑은 고딕"/>
                         </a:rPr>
-                        <a:t>60만~</a:t>
+                        <a:t>600,000 원</a:t>
                       </a:r>
                     </a:p>
                   </a:txBody>
@@ -4898,7 +4898,7 @@
                           </a:solidFill>
                           <a:latin typeface="맑은 고딕"/>
                         </a:rPr>
-                        <a:t>탑500·로200만</a:t>
+                        <a:t>5,000,000 원</a:t>
                       </a:r>
                     </a:p>
                   </a:txBody>
@@ -5096,7 +5096,7 @@
                           </a:solidFill>
                           <a:latin typeface="맑은 고딕"/>
                         </a:rPr>
-                        <a:t>25만~</a:t>
+                        <a:t>250,000 원</a:t>
                       </a:r>
                     </a:p>
                   </a:txBody>
@@ -5294,7 +5294,7 @@
                           </a:solidFill>
                           <a:latin typeface="맑은 고딕"/>
                         </a:rPr>
-                        <a:t>자체 제작(편)</a:t>
+                        <a:t>1,500,000 원</a:t>
                       </a:r>
                     </a:p>
                   </a:txBody>
@@ -5564,18 +5564,6 @@
                         <a:t>KV·디자인·영상</a:t>
                       </a:r>
                     </a:p>
-                    <a:p>
-                      <a:pPr algn="l"/>
-                      <a:r>
-                        <a:rPr sz="750">
-                          <a:solidFill>
-                            <a:srgbClr val="707070"/>
-                          </a:solidFill>
-                          <a:latin typeface="맑은 고딕"/>
-                        </a:rPr>
-                        <a:t>제작(●=진행)</a:t>
-                      </a:r>
-                    </a:p>
                   </a:txBody>
                   <a:tcPr marL="50800" marR="50800" marT="12700" marB="12700" anchor="ctr">
                     <a:solidFill>
@@ -5759,7 +5747,7 @@
                           </a:solidFill>
                           <a:latin typeface="맑은 고딕"/>
                         </a:rPr>
-                        <a:t>기타 (자체 비용 0)</a:t>
+                        <a:t>기타</a:t>
                       </a:r>
                     </a:p>
                   </a:txBody>
@@ -5852,7 +5840,7 @@
                           </a:solidFill>
                           <a:latin typeface="맑은 고딕"/>
                         </a:rPr>
-                        <a:t>올영 쇼핑 큐레이터·누적</a:t>
+                        <a:t>올영 쇼핑 큐레이터·누적 (명)</a:t>
                       </a:r>
                     </a:p>
                   </a:txBody>
@@ -6591,7 +6579,7 @@
         </p:nvGraphicFramePr>
         <p:xfrm>
           <a:off x="640080" y="960120"/>
-          <a:ext cx="10881360" cy="4937760"/>
+          <a:ext cx="10881360" cy="5184648"/>
         </p:xfrm>
         <a:graphic>
           <a:graphicData uri="http://schemas.openxmlformats.org/drawingml/2006/table">
@@ -6905,7 +6893,7 @@
                           </a:solidFill>
                           <a:latin typeface="맑은 고딕"/>
                         </a:rPr>
-                        <a:t>KV·디자인·영상·콘텐츠 제작 (EGC 포함)</a:t>
+                        <a:t>KV·디자인·영상·콘텐츠 제작 (EGC 제외)</a:t>
                       </a:r>
                     </a:p>
                   </a:txBody>
@@ -6974,7 +6962,101 @@
                           </a:solidFill>
                           <a:latin typeface="맑은 고딕"/>
                         </a:rPr>
-                        <a:t>83,600,000</a:t>
+                        <a:t>68,600,000</a:t>
+                      </a:r>
+                    </a:p>
+                  </a:txBody>
+                  <a:tcPr marL="50800" marR="50800" marT="12700" marB="12700" anchor="ctr">
+                    <a:solidFill>
+                      <a:srgbClr val="FFFFFF"/>
+                    </a:solidFill>
+                  </a:tcPr>
+                </a:tc>
+              </a:tr>
+              <a:tr h="246888">
+                <a:tc>
+                  <a:txBody>
+                    <a:bodyPr wrap="square"/>
+                    <a:lstStyle/>
+                    <a:p>
+                      <a:pPr algn="l"/>
+                      <a:r>
+                        <a:rPr sz="950" b="0">
+                          <a:solidFill>
+                            <a:srgbClr val="111111"/>
+                          </a:solidFill>
+                          <a:latin typeface="맑은 고딕"/>
+                        </a:rPr>
+                        <a:t>EGC 콘텐츠</a:t>
+                      </a:r>
+                    </a:p>
+                  </a:txBody>
+                  <a:tcPr marL="50800" marR="50800" marT="12700" marB="12700" anchor="ctr">
+                    <a:solidFill>
+                      <a:srgbClr val="FFFFFF"/>
+                    </a:solidFill>
+                  </a:tcPr>
+                </a:tc>
+                <a:tc>
+                  <a:txBody>
+                    <a:bodyPr wrap="square"/>
+                    <a:lstStyle/>
+                    <a:p>
+                      <a:pPr algn="ctr"/>
+                      <a:r>
+                        <a:rPr sz="900" b="0">
+                          <a:solidFill>
+                            <a:srgbClr val="333333"/>
+                          </a:solidFill>
+                          <a:latin typeface="맑은 고딕"/>
+                        </a:rPr>
+                        <a:t>10</a:t>
+                      </a:r>
+                    </a:p>
+                  </a:txBody>
+                  <a:tcPr marL="50800" marR="50800" marT="12700" marB="12700" anchor="ctr">
+                    <a:solidFill>
+                      <a:srgbClr val="FFFFFF"/>
+                    </a:solidFill>
+                  </a:tcPr>
+                </a:tc>
+                <a:tc>
+                  <a:txBody>
+                    <a:bodyPr wrap="square"/>
+                    <a:lstStyle/>
+                    <a:p>
+                      <a:pPr algn="ctr"/>
+                      <a:r>
+                        <a:rPr sz="900" b="0">
+                          <a:solidFill>
+                            <a:srgbClr val="333333"/>
+                          </a:solidFill>
+                          <a:latin typeface="맑은 고딕"/>
+                        </a:rPr>
+                        <a:t>1,500,000</a:t>
+                      </a:r>
+                    </a:p>
+                  </a:txBody>
+                  <a:tcPr marL="50800" marR="50800" marT="12700" marB="12700" anchor="ctr">
+                    <a:solidFill>
+                      <a:srgbClr val="FFFFFF"/>
+                    </a:solidFill>
+                  </a:tcPr>
+                </a:tc>
+                <a:tc>
+                  <a:txBody>
+                    <a:bodyPr wrap="square"/>
+                    <a:lstStyle/>
+                    <a:p>
+                      <a:pPr algn="r"/>
+                      <a:r>
+                        <a:rPr sz="1000" b="1">
+                          <a:solidFill>
+                            <a:srgbClr val="111111"/>
+                          </a:solidFill>
+                          <a:latin typeface="맑은 고딕"/>
+                        </a:rPr>
+                        <a:t>15,000,000</a:t>
                       </a:r>
                     </a:p>
                   </a:txBody>
@@ -8203,7 +8285,7 @@
                 </a:solidFill>
                 <a:latin typeface="맑은 고딕"/>
               </a:rPr>
-              <a:t>· 프로젝트 대행료 10%(2,500만), 차액은 제작비(KV·콘텐츠 제작)에 반영 · 공급가액 2.5억은 콘텐츠·시딩·바이럴·제작·대행 운영분</a:t>
+              <a:t>· 프로젝트 대행료 10%(2,500만), 차액은 제작비에 반영 · EGC 콘텐츠는 건당 1,500,000원 별도 산정 · 공급가액 2.5억(VAT 별도)</a:t>
             </a:r>
           </a:p>
           <a:p>

--- a/proposal/올더베러_액션플랜_견적서_편집용.pptx
+++ b/proposal/올더베러_액션플랜_견적서_편집용.pptx
@@ -3850,13 +3850,13 @@
                           </a:solidFill>
                           <a:latin typeface="맑은 고딕"/>
                         </a:rPr>
-                        <a:t>18</a:t>
-                      </a:r>
-                    </a:p>
-                  </a:txBody>
-                  <a:tcPr marL="50800" marR="50800" marT="12700" marB="12700" anchor="ctr">
-                    <a:solidFill>
-                      <a:srgbClr val="A9A9A9"/>
+                        <a:t>15</a:t>
+                      </a:r>
+                    </a:p>
+                  </a:txBody>
+                  <a:tcPr marL="50800" marR="50800" marT="12700" marB="12700" anchor="ctr">
+                    <a:solidFill>
+                      <a:srgbClr val="B7B7B7"/>
                     </a:solidFill>
                   </a:tcPr>
                 </a:tc>
@@ -3919,13 +3919,13 @@
                           </a:solidFill>
                           <a:latin typeface="맑은 고딕"/>
                         </a:rPr>
-                        <a:t>17</a:t>
-                      </a:r>
-                    </a:p>
-                  </a:txBody>
-                  <a:tcPr marL="50800" marR="50800" marT="12700" marB="12700" anchor="ctr">
-                    <a:solidFill>
-                      <a:srgbClr val="AEAEAE"/>
+                        <a:t>15</a:t>
+                      </a:r>
+                    </a:p>
+                  </a:txBody>
+                  <a:tcPr marL="50800" marR="50800" marT="12700" marB="12700" anchor="ctr">
+                    <a:solidFill>
+                      <a:srgbClr val="B7B7B7"/>
                     </a:solidFill>
                   </a:tcPr>
                 </a:tc>
@@ -3942,13 +3942,13 @@
                           </a:solidFill>
                           <a:latin typeface="맑은 고딕"/>
                         </a:rPr>
-                        <a:t>28</a:t>
-                      </a:r>
-                    </a:p>
-                  </a:txBody>
-                  <a:tcPr marL="50800" marR="50800" marT="12700" marB="12700" anchor="ctr">
-                    <a:solidFill>
-                      <a:srgbClr val="797979"/>
+                        <a:t>30</a:t>
+                      </a:r>
+                    </a:p>
+                  </a:txBody>
+                  <a:tcPr marL="50800" marR="50800" marT="12700" marB="12700" anchor="ctr">
+                    <a:solidFill>
+                      <a:srgbClr val="6F6F6F"/>
                     </a:solidFill>
                   </a:tcPr>
                 </a:tc>
@@ -3965,13 +3965,13 @@
                           </a:solidFill>
                           <a:latin typeface="맑은 고딕"/>
                         </a:rPr>
-                        <a:t>32</a:t>
-                      </a:r>
-                    </a:p>
-                  </a:txBody>
-                  <a:tcPr marL="50800" marR="50800" marT="12700" marB="12700" anchor="ctr">
-                    <a:solidFill>
-                      <a:srgbClr val="666666"/>
+                        <a:t>35</a:t>
+                      </a:r>
+                    </a:p>
+                  </a:txBody>
+                  <a:tcPr marL="50800" marR="50800" marT="12700" marB="12700" anchor="ctr">
+                    <a:solidFill>
+                      <a:srgbClr val="575757"/>
                     </a:solidFill>
                   </a:tcPr>
                 </a:tc>
@@ -4048,13 +4048,13 @@
                           </a:solidFill>
                           <a:latin typeface="맑은 고딕"/>
                         </a:rPr>
-                        <a:t>22</a:t>
-                      </a:r>
-                    </a:p>
-                  </a:txBody>
-                  <a:tcPr marL="50800" marR="50800" marT="12700" marB="12700" anchor="ctr">
-                    <a:solidFill>
-                      <a:srgbClr val="A7A7A7"/>
+                        <a:t>20</a:t>
+                      </a:r>
+                    </a:p>
+                  </a:txBody>
+                  <a:tcPr marL="50800" marR="50800" marT="12700" marB="12700" anchor="ctr">
+                    <a:solidFill>
+                      <a:srgbClr val="B5B5B5"/>
                     </a:solidFill>
                   </a:tcPr>
                 </a:tc>
@@ -4071,7 +4071,7 @@
                           </a:solidFill>
                           <a:latin typeface="맑은 고딕"/>
                         </a:rPr>
-                        <a:t>42</a:t>
+                        <a:t>45</a:t>
                       </a:r>
                     </a:p>
                   </a:txBody>
@@ -4100,7 +4100,7 @@
                   </a:txBody>
                   <a:tcPr marL="50800" marR="50800" marT="12700" marB="12700" anchor="ctr">
                     <a:solidFill>
-                      <a:srgbClr val="9B9B9B"/>
+                      <a:srgbClr val="A2A2A2"/>
                     </a:solidFill>
                   </a:tcPr>
                 </a:tc>
@@ -4123,7 +4123,7 @@
                   </a:txBody>
                   <a:tcPr marL="50800" marR="50800" marT="12700" marB="12700" anchor="ctr">
                     <a:solidFill>
-                      <a:srgbClr val="AFAFAF"/>
+                      <a:srgbClr val="B5B5B5"/>
                     </a:solidFill>
                   </a:tcPr>
                 </a:tc>
@@ -4146,7 +4146,7 @@
                   </a:txBody>
                   <a:tcPr marL="50800" marR="50800" marT="12700" marB="12700" anchor="ctr">
                     <a:solidFill>
-                      <a:srgbClr val="878787"/>
+                      <a:srgbClr val="8F8F8F"/>
                     </a:solidFill>
                   </a:tcPr>
                 </a:tc>
@@ -4163,13 +4163,13 @@
                           </a:solidFill>
                           <a:latin typeface="맑은 고딕"/>
                         </a:rPr>
-                        <a:t>36</a:t>
-                      </a:r>
-                    </a:p>
-                  </a:txBody>
-                  <a:tcPr marL="50800" marR="50800" marT="12700" marB="12700" anchor="ctr">
-                    <a:solidFill>
-                      <a:srgbClr val="6F6F6F"/>
+                        <a:t>35</a:t>
+                      </a:r>
+                    </a:p>
+                  </a:txBody>
+                  <a:tcPr marL="50800" marR="50800" marT="12700" marB="12700" anchor="ctr">
+                    <a:solidFill>
+                      <a:srgbClr val="7D7D7D"/>
                     </a:solidFill>
                   </a:tcPr>
                 </a:tc>
@@ -6049,7 +6049,7 @@
                           </a:solidFill>
                           <a:latin typeface="맑은 고딕"/>
                         </a:rPr>
-                        <a:t>50</a:t>
+                        <a:t>45</a:t>
                       </a:r>
                     </a:p>
                   </a:txBody>
@@ -6072,7 +6072,7 @@
                           </a:solidFill>
                           <a:latin typeface="맑은 고딕"/>
                         </a:rPr>
-                        <a:t>97</a:t>
+                        <a:t>100</a:t>
                       </a:r>
                     </a:p>
                   </a:txBody>
@@ -6118,7 +6118,7 @@
                           </a:solidFill>
                           <a:latin typeface="맑은 고딕"/>
                         </a:rPr>
-                        <a:t>47</a:t>
+                        <a:t>45</a:t>
                       </a:r>
                     </a:p>
                   </a:txBody>
@@ -6141,7 +6141,7 @@
                           </a:solidFill>
                           <a:latin typeface="맑은 고딕"/>
                         </a:rPr>
-                        <a:t>78</a:t>
+                        <a:t>80</a:t>
                       </a:r>
                     </a:p>
                   </a:txBody>
@@ -6164,7 +6164,7 @@
                           </a:solidFill>
                           <a:latin typeface="맑은 고딕"/>
                         </a:rPr>
-                        <a:t>88</a:t>
+                        <a:t>90</a:t>
                       </a:r>
                     </a:p>
                   </a:txBody>

--- a/proposal/올더베러_액션플랜_견적서_편집용.pptx
+++ b/proposal/올더베러_액션플랜_견적서_편집용.pptx
@@ -4048,13 +4048,13 @@
                           </a:solidFill>
                           <a:latin typeface="맑은 고딕"/>
                         </a:rPr>
-                        <a:t>20</a:t>
-                      </a:r>
-                    </a:p>
-                  </a:txBody>
-                  <a:tcPr marL="50800" marR="50800" marT="12700" marB="12700" anchor="ctr">
-                    <a:solidFill>
-                      <a:srgbClr val="B5B5B5"/>
+                        <a:t>30</a:t>
+                      </a:r>
+                    </a:p>
+                  </a:txBody>
+                  <a:tcPr marL="50800" marR="50800" marT="12700" marB="12700" anchor="ctr">
+                    <a:solidFill>
+                      <a:srgbClr val="B2B2B2"/>
                     </a:solidFill>
                   </a:tcPr>
                 </a:tc>
@@ -4071,7 +4071,7 @@
                           </a:solidFill>
                           <a:latin typeface="맑은 고딕"/>
                         </a:rPr>
-                        <a:t>45</a:t>
+                        <a:t>65</a:t>
                       </a:r>
                     </a:p>
                   </a:txBody>
@@ -4094,13 +4094,13 @@
                           </a:solidFill>
                           <a:latin typeface="맑은 고딕"/>
                         </a:rPr>
-                        <a:t>25</a:t>
-                      </a:r>
-                    </a:p>
-                  </a:txBody>
-                  <a:tcPr marL="50800" marR="50800" marT="12700" marB="12700" anchor="ctr">
-                    <a:solidFill>
-                      <a:srgbClr val="A2A2A2"/>
+                        <a:t>40</a:t>
+                      </a:r>
+                    </a:p>
+                  </a:txBody>
+                  <a:tcPr marL="50800" marR="50800" marT="12700" marB="12700" anchor="ctr">
+                    <a:solidFill>
+                      <a:srgbClr val="989898"/>
                     </a:solidFill>
                   </a:tcPr>
                 </a:tc>
@@ -4117,13 +4117,13 @@
                           </a:solidFill>
                           <a:latin typeface="맑은 고딕"/>
                         </a:rPr>
-                        <a:t>20</a:t>
-                      </a:r>
-                    </a:p>
-                  </a:txBody>
-                  <a:tcPr marL="50800" marR="50800" marT="12700" marB="12700" anchor="ctr">
-                    <a:solidFill>
-                      <a:srgbClr val="B5B5B5"/>
+                        <a:t>30</a:t>
+                      </a:r>
+                    </a:p>
+                  </a:txBody>
+                  <a:tcPr marL="50800" marR="50800" marT="12700" marB="12700" anchor="ctr">
+                    <a:solidFill>
+                      <a:srgbClr val="B2B2B2"/>
                     </a:solidFill>
                   </a:tcPr>
                 </a:tc>
@@ -4136,57 +4136,57 @@
                       <a:r>
                         <a:rPr sz="1100" b="1">
                           <a:solidFill>
+                            <a:srgbClr val="FFFFFF"/>
+                          </a:solidFill>
+                          <a:latin typeface="맑은 고딕"/>
+                        </a:rPr>
+                        <a:t>50</a:t>
+                      </a:r>
+                    </a:p>
+                  </a:txBody>
+                  <a:tcPr marL="50800" marR="50800" marT="12700" marB="12700" anchor="ctr">
+                    <a:solidFill>
+                      <a:srgbClr val="7E7E7E"/>
+                    </a:solidFill>
+                  </a:tcPr>
+                </a:tc>
+                <a:tc>
+                  <a:txBody>
+                    <a:bodyPr wrap="square"/>
+                    <a:lstStyle/>
+                    <a:p>
+                      <a:pPr algn="ctr"/>
+                      <a:r>
+                        <a:rPr sz="1100" b="1">
+                          <a:solidFill>
+                            <a:srgbClr val="FFFFFF"/>
+                          </a:solidFill>
+                          <a:latin typeface="맑은 고딕"/>
+                        </a:rPr>
+                        <a:t>60</a:t>
+                      </a:r>
+                    </a:p>
+                  </a:txBody>
+                  <a:tcPr marL="50800" marR="50800" marT="12700" marB="12700" anchor="ctr">
+                    <a:solidFill>
+                      <a:srgbClr val="646464"/>
+                    </a:solidFill>
+                  </a:tcPr>
+                </a:tc>
+                <a:tc>
+                  <a:txBody>
+                    <a:bodyPr wrap="square"/>
+                    <a:lstStyle/>
+                    <a:p>
+                      <a:pPr algn="ctr"/>
+                      <a:r>
+                        <a:rPr sz="950" b="1">
+                          <a:solidFill>
                             <a:srgbClr val="111111"/>
                           </a:solidFill>
                           <a:latin typeface="맑은 고딕"/>
                         </a:rPr>
-                        <a:t>30</a:t>
-                      </a:r>
-                    </a:p>
-                  </a:txBody>
-                  <a:tcPr marL="50800" marR="50800" marT="12700" marB="12700" anchor="ctr">
-                    <a:solidFill>
-                      <a:srgbClr val="8F8F8F"/>
-                    </a:solidFill>
-                  </a:tcPr>
-                </a:tc>
-                <a:tc>
-                  <a:txBody>
-                    <a:bodyPr wrap="square"/>
-                    <a:lstStyle/>
-                    <a:p>
-                      <a:pPr algn="ctr"/>
-                      <a:r>
-                        <a:rPr sz="1100" b="1">
-                          <a:solidFill>
-                            <a:srgbClr val="FFFFFF"/>
-                          </a:solidFill>
-                          <a:latin typeface="맑은 고딕"/>
-                        </a:rPr>
-                        <a:t>35</a:t>
-                      </a:r>
-                    </a:p>
-                  </a:txBody>
-                  <a:tcPr marL="50800" marR="50800" marT="12700" marB="12700" anchor="ctr">
-                    <a:solidFill>
-                      <a:srgbClr val="7D7D7D"/>
-                    </a:solidFill>
-                  </a:tcPr>
-                </a:tc>
-                <a:tc>
-                  <a:txBody>
-                    <a:bodyPr wrap="square"/>
-                    <a:lstStyle/>
-                    <a:p>
-                      <a:pPr algn="ctr"/>
-                      <a:r>
-                        <a:rPr sz="950" b="1">
-                          <a:solidFill>
-                            <a:srgbClr val="111111"/>
-                          </a:solidFill>
-                          <a:latin typeface="맑은 고딕"/>
-                        </a:rPr>
-                        <a:t>175</a:t>
+                        <a:t>275</a:t>
                       </a:r>
                     </a:p>
                   </a:txBody>
@@ -6049,7 +6049,7 @@
                           </a:solidFill>
                           <a:latin typeface="맑은 고딕"/>
                         </a:rPr>
-                        <a:t>45</a:t>
+                        <a:t>55</a:t>
                       </a:r>
                     </a:p>
                   </a:txBody>
@@ -6072,6 +6072,75 @@
                           </a:solidFill>
                           <a:latin typeface="맑은 고딕"/>
                         </a:rPr>
+                        <a:t>120</a:t>
+                      </a:r>
+                    </a:p>
+                  </a:txBody>
+                  <a:tcPr marL="50800" marR="50800" marT="12700" marB="12700" anchor="ctr">
+                    <a:solidFill>
+                      <a:srgbClr val="111111"/>
+                    </a:solidFill>
+                  </a:tcPr>
+                </a:tc>
+                <a:tc>
+                  <a:txBody>
+                    <a:bodyPr wrap="square"/>
+                    <a:lstStyle/>
+                    <a:p>
+                      <a:pPr algn="ctr"/>
+                      <a:r>
+                        <a:rPr sz="1100" b="1">
+                          <a:solidFill>
+                            <a:srgbClr val="FFFFFF"/>
+                          </a:solidFill>
+                          <a:latin typeface="맑은 고딕"/>
+                        </a:rPr>
+                        <a:t>70</a:t>
+                      </a:r>
+                    </a:p>
+                  </a:txBody>
+                  <a:tcPr marL="50800" marR="50800" marT="12700" marB="12700" anchor="ctr">
+                    <a:solidFill>
+                      <a:srgbClr val="111111"/>
+                    </a:solidFill>
+                  </a:tcPr>
+                </a:tc>
+                <a:tc>
+                  <a:txBody>
+                    <a:bodyPr wrap="square"/>
+                    <a:lstStyle/>
+                    <a:p>
+                      <a:pPr algn="ctr"/>
+                      <a:r>
+                        <a:rPr sz="1100" b="1">
+                          <a:solidFill>
+                            <a:srgbClr val="FFFFFF"/>
+                          </a:solidFill>
+                          <a:latin typeface="맑은 고딕"/>
+                        </a:rPr>
+                        <a:t>55</a:t>
+                      </a:r>
+                    </a:p>
+                  </a:txBody>
+                  <a:tcPr marL="50800" marR="50800" marT="12700" marB="12700" anchor="ctr">
+                    <a:solidFill>
+                      <a:srgbClr val="111111"/>
+                    </a:solidFill>
+                  </a:tcPr>
+                </a:tc>
+                <a:tc>
+                  <a:txBody>
+                    <a:bodyPr wrap="square"/>
+                    <a:lstStyle/>
+                    <a:p>
+                      <a:pPr algn="ctr"/>
+                      <a:r>
+                        <a:rPr sz="1100" b="1">
+                          <a:solidFill>
+                            <a:srgbClr val="FFFFFF"/>
+                          </a:solidFill>
+                          <a:latin typeface="맑은 고딕"/>
+                        </a:rPr>
                         <a:t>100</a:t>
                       </a:r>
                     </a:p>
@@ -6095,7 +6164,7 @@
                           </a:solidFill>
                           <a:latin typeface="맑은 고딕"/>
                         </a:rPr>
-                        <a:t>55</a:t>
+                        <a:t>115</a:t>
                       </a:r>
                     </a:p>
                   </a:txBody>
@@ -6112,82 +6181,13 @@
                     <a:p>
                       <a:pPr algn="ctr"/>
                       <a:r>
-                        <a:rPr sz="1100" b="1">
+                        <a:rPr sz="1000" b="1">
                           <a:solidFill>
                             <a:srgbClr val="FFFFFF"/>
                           </a:solidFill>
                           <a:latin typeface="맑은 고딕"/>
                         </a:rPr>
-                        <a:t>45</a:t>
-                      </a:r>
-                    </a:p>
-                  </a:txBody>
-                  <a:tcPr marL="50800" marR="50800" marT="12700" marB="12700" anchor="ctr">
-                    <a:solidFill>
-                      <a:srgbClr val="111111"/>
-                    </a:solidFill>
-                  </a:tcPr>
-                </a:tc>
-                <a:tc>
-                  <a:txBody>
-                    <a:bodyPr wrap="square"/>
-                    <a:lstStyle/>
-                    <a:p>
-                      <a:pPr algn="ctr"/>
-                      <a:r>
-                        <a:rPr sz="1100" b="1">
-                          <a:solidFill>
-                            <a:srgbClr val="FFFFFF"/>
-                          </a:solidFill>
-                          <a:latin typeface="맑은 고딕"/>
-                        </a:rPr>
-                        <a:t>80</a:t>
-                      </a:r>
-                    </a:p>
-                  </a:txBody>
-                  <a:tcPr marL="50800" marR="50800" marT="12700" marB="12700" anchor="ctr">
-                    <a:solidFill>
-                      <a:srgbClr val="111111"/>
-                    </a:solidFill>
-                  </a:tcPr>
-                </a:tc>
-                <a:tc>
-                  <a:txBody>
-                    <a:bodyPr wrap="square"/>
-                    <a:lstStyle/>
-                    <a:p>
-                      <a:pPr algn="ctr"/>
-                      <a:r>
-                        <a:rPr sz="1100" b="1">
-                          <a:solidFill>
-                            <a:srgbClr val="FFFFFF"/>
-                          </a:solidFill>
-                          <a:latin typeface="맑은 고딕"/>
-                        </a:rPr>
-                        <a:t>90</a:t>
-                      </a:r>
-                    </a:p>
-                  </a:txBody>
-                  <a:tcPr marL="50800" marR="50800" marT="12700" marB="12700" anchor="ctr">
-                    <a:solidFill>
-                      <a:srgbClr val="111111"/>
-                    </a:solidFill>
-                  </a:tcPr>
-                </a:tc>
-                <a:tc>
-                  <a:txBody>
-                    <a:bodyPr wrap="square"/>
-                    <a:lstStyle/>
-                    <a:p>
-                      <a:pPr algn="ctr"/>
-                      <a:r>
-                        <a:rPr sz="1000" b="1">
-                          <a:solidFill>
-                            <a:srgbClr val="FFFFFF"/>
-                          </a:solidFill>
-                          <a:latin typeface="맑은 고딕"/>
-                        </a:rPr>
-                        <a:t>415건</a:t>
+                        <a:t>515건</a:t>
                       </a:r>
                     </a:p>
                   </a:txBody>
@@ -6501,7 +6501,7 @@
                 </a:solidFill>
                 <a:latin typeface="맑은 고딕"/>
               </a:rPr>
-              <a:t>※ 셀 음영이 진할수록 물량 多 · KOL 무가시딩·어필리에이트는 올영 부담/무가로 자체 비용 0 · 퍼포먼스 매체는 별도(별첨)</a:t>
+              <a:t>※ 셀 음영이 진할수록 물량 多 · 8·11·12월 집중 운영 · 퍼포먼스 매체는 별도(별첨)</a:t>
             </a:r>
           </a:p>
         </p:txBody>
@@ -6579,7 +6579,7 @@
         </p:nvGraphicFramePr>
         <p:xfrm>
           <a:off x="640080" y="960120"/>
-          <a:ext cx="10881360" cy="5184648"/>
+          <a:ext cx="10881360" cy="4690872"/>
         </p:xfrm>
         <a:graphic>
           <a:graphicData uri="http://schemas.openxmlformats.org/drawingml/2006/table">
@@ -6701,7 +6701,7 @@
                           </a:solidFill>
                           <a:latin typeface="맑은 고딕"/>
                         </a:rPr>
-                        <a:t>프로젝트 대행료</a:t>
+                        <a:t>제작비</a:t>
                       </a:r>
                     </a:p>
                   </a:txBody>
@@ -6750,7 +6750,7 @@
                           </a:solidFill>
                           <a:latin typeface="맑은 고딕"/>
                         </a:rPr>
-                        <a:t>기획·운영비 (수수료 · 10%)</a:t>
+                        <a:t>KV·디자인·영상·콘텐츠 제작 (EGC 제외)</a:t>
                       </a:r>
                     </a:p>
                   </a:txBody>
@@ -6819,7 +6819,101 @@
                           </a:solidFill>
                           <a:latin typeface="맑은 고딕"/>
                         </a:rPr>
-                        <a:t>25,000,000</a:t>
+                        <a:t>68,600,000</a:t>
+                      </a:r>
+                    </a:p>
+                  </a:txBody>
+                  <a:tcPr marL="50800" marR="50800" marT="12700" marB="12700" anchor="ctr">
+                    <a:solidFill>
+                      <a:srgbClr val="FFFFFF"/>
+                    </a:solidFill>
+                  </a:tcPr>
+                </a:tc>
+              </a:tr>
+              <a:tr h="246888">
+                <a:tc>
+                  <a:txBody>
+                    <a:bodyPr wrap="square"/>
+                    <a:lstStyle/>
+                    <a:p>
+                      <a:pPr algn="l"/>
+                      <a:r>
+                        <a:rPr sz="950" b="0">
+                          <a:solidFill>
+                            <a:srgbClr val="111111"/>
+                          </a:solidFill>
+                          <a:latin typeface="맑은 고딕"/>
+                        </a:rPr>
+                        <a:t>EGC 콘텐츠</a:t>
+                      </a:r>
+                    </a:p>
+                  </a:txBody>
+                  <a:tcPr marL="50800" marR="50800" marT="12700" marB="12700" anchor="ctr">
+                    <a:solidFill>
+                      <a:srgbClr val="FFFFFF"/>
+                    </a:solidFill>
+                  </a:tcPr>
+                </a:tc>
+                <a:tc>
+                  <a:txBody>
+                    <a:bodyPr wrap="square"/>
+                    <a:lstStyle/>
+                    <a:p>
+                      <a:pPr algn="ctr"/>
+                      <a:r>
+                        <a:rPr sz="900" b="0">
+                          <a:solidFill>
+                            <a:srgbClr val="333333"/>
+                          </a:solidFill>
+                          <a:latin typeface="맑은 고딕"/>
+                        </a:rPr>
+                        <a:t>10</a:t>
+                      </a:r>
+                    </a:p>
+                  </a:txBody>
+                  <a:tcPr marL="50800" marR="50800" marT="12700" marB="12700" anchor="ctr">
+                    <a:solidFill>
+                      <a:srgbClr val="FFFFFF"/>
+                    </a:solidFill>
+                  </a:tcPr>
+                </a:tc>
+                <a:tc>
+                  <a:txBody>
+                    <a:bodyPr wrap="square"/>
+                    <a:lstStyle/>
+                    <a:p>
+                      <a:pPr algn="ctr"/>
+                      <a:r>
+                        <a:rPr sz="900" b="0">
+                          <a:solidFill>
+                            <a:srgbClr val="333333"/>
+                          </a:solidFill>
+                          <a:latin typeface="맑은 고딕"/>
+                        </a:rPr>
+                        <a:t>1,500,000</a:t>
+                      </a:r>
+                    </a:p>
+                  </a:txBody>
+                  <a:tcPr marL="50800" marR="50800" marT="12700" marB="12700" anchor="ctr">
+                    <a:solidFill>
+                      <a:srgbClr val="FFFFFF"/>
+                    </a:solidFill>
+                  </a:tcPr>
+                </a:tc>
+                <a:tc>
+                  <a:txBody>
+                    <a:bodyPr wrap="square"/>
+                    <a:lstStyle/>
+                    <a:p>
+                      <a:pPr algn="r"/>
+                      <a:r>
+                        <a:rPr sz="1000" b="1">
+                          <a:solidFill>
+                            <a:srgbClr val="111111"/>
+                          </a:solidFill>
+                          <a:latin typeface="맑은 고딕"/>
+                        </a:rPr>
+                        <a:t>15,000,000</a:t>
                       </a:r>
                     </a:p>
                   </a:txBody>
@@ -6844,7 +6938,7 @@
                           </a:solidFill>
                           <a:latin typeface="맑은 고딕"/>
                         </a:rPr>
-                        <a:t>제작비</a:t>
+                        <a:t>크리에이터 시딩</a:t>
                       </a:r>
                     </a:p>
                   </a:txBody>
@@ -6893,7 +6987,7 @@
                           </a:solidFill>
                           <a:latin typeface="맑은 고딕"/>
                         </a:rPr>
-                        <a:t>KV·디자인·영상·콘텐츠 제작 (EGC 제외)</a:t>
+                        <a:t>매크로 (인스타·유튜브)</a:t>
                       </a:r>
                     </a:p>
                   </a:txBody>
@@ -6916,7 +7010,7 @@
                           </a:solidFill>
                           <a:latin typeface="맑은 고딕"/>
                         </a:rPr>
-                        <a:t>1식</a:t>
+                        <a:t>15</a:t>
                       </a:r>
                     </a:p>
                   </a:txBody>
@@ -6939,7 +7033,7 @@
                           </a:solidFill>
                           <a:latin typeface="맑은 고딕"/>
                         </a:rPr>
-                        <a:t>-</a:t>
+                        <a:t>800,000</a:t>
                       </a:r>
                     </a:p>
                   </a:txBody>
@@ -6962,7 +7056,7 @@
                           </a:solidFill>
                           <a:latin typeface="맑은 고딕"/>
                         </a:rPr>
-                        <a:t>68,600,000</a:t>
+                        <a:t>12,000,000</a:t>
                       </a:r>
                     </a:p>
                   </a:txBody>
@@ -6987,7 +7081,7 @@
                           </a:solidFill>
                           <a:latin typeface="맑은 고딕"/>
                         </a:rPr>
-                        <a:t>EGC 콘텐츠</a:t>
+                        <a:t>마이크로</a:t>
                       </a:r>
                     </a:p>
                   </a:txBody>
@@ -7010,7 +7104,7 @@
                           </a:solidFill>
                           <a:latin typeface="맑은 고딕"/>
                         </a:rPr>
-                        <a:t>10</a:t>
+                        <a:t>150</a:t>
                       </a:r>
                     </a:p>
                   </a:txBody>
@@ -7033,7 +7127,7 @@
                           </a:solidFill>
                           <a:latin typeface="맑은 고딕"/>
                         </a:rPr>
-                        <a:t>1,500,000</a:t>
+                        <a:t>400,000</a:t>
                       </a:r>
                     </a:p>
                   </a:txBody>
@@ -7056,7 +7150,289 @@
                           </a:solidFill>
                           <a:latin typeface="맑은 고딕"/>
                         </a:rPr>
-                        <a:t>15,000,000</a:t>
+                        <a:t>60,000,000</a:t>
+                      </a:r>
+                    </a:p>
+                  </a:txBody>
+                  <a:tcPr marL="50800" marR="50800" marT="12700" marB="12700" anchor="ctr">
+                    <a:solidFill>
+                      <a:srgbClr val="FFFFFF"/>
+                    </a:solidFill>
+                  </a:tcPr>
+                </a:tc>
+              </a:tr>
+              <a:tr h="246888">
+                <a:tc>
+                  <a:txBody>
+                    <a:bodyPr wrap="square"/>
+                    <a:lstStyle/>
+                    <a:p>
+                      <a:pPr algn="l"/>
+                      <a:r>
+                        <a:rPr sz="950" b="0">
+                          <a:solidFill>
+                            <a:srgbClr val="111111"/>
+                          </a:solidFill>
+                          <a:latin typeface="맑은 고딕"/>
+                        </a:rPr>
+                        <a:t>나노</a:t>
+                      </a:r>
+                    </a:p>
+                  </a:txBody>
+                  <a:tcPr marL="50800" marR="50800" marT="12700" marB="12700" anchor="ctr">
+                    <a:solidFill>
+                      <a:srgbClr val="FFFFFF"/>
+                    </a:solidFill>
+                  </a:tcPr>
+                </a:tc>
+                <a:tc>
+                  <a:txBody>
+                    <a:bodyPr wrap="square"/>
+                    <a:lstStyle/>
+                    <a:p>
+                      <a:pPr algn="ctr"/>
+                      <a:r>
+                        <a:rPr sz="900" b="0">
+                          <a:solidFill>
+                            <a:srgbClr val="333333"/>
+                          </a:solidFill>
+                          <a:latin typeface="맑은 고딕"/>
+                        </a:rPr>
+                        <a:t>275</a:t>
+                      </a:r>
+                    </a:p>
+                  </a:txBody>
+                  <a:tcPr marL="50800" marR="50800" marT="12700" marB="12700" anchor="ctr">
+                    <a:solidFill>
+                      <a:srgbClr val="FFFFFF"/>
+                    </a:solidFill>
+                  </a:tcPr>
+                </a:tc>
+                <a:tc>
+                  <a:txBody>
+                    <a:bodyPr wrap="square"/>
+                    <a:lstStyle/>
+                    <a:p>
+                      <a:pPr algn="ctr"/>
+                      <a:r>
+                        <a:rPr sz="900" b="0">
+                          <a:solidFill>
+                            <a:srgbClr val="333333"/>
+                          </a:solidFill>
+                          <a:latin typeface="맑은 고딕"/>
+                        </a:rPr>
+                        <a:t>250,000</a:t>
+                      </a:r>
+                    </a:p>
+                  </a:txBody>
+                  <a:tcPr marL="50800" marR="50800" marT="12700" marB="12700" anchor="ctr">
+                    <a:solidFill>
+                      <a:srgbClr val="FFFFFF"/>
+                    </a:solidFill>
+                  </a:tcPr>
+                </a:tc>
+                <a:tc>
+                  <a:txBody>
+                    <a:bodyPr wrap="square"/>
+                    <a:lstStyle/>
+                    <a:p>
+                      <a:pPr algn="r"/>
+                      <a:r>
+                        <a:rPr sz="1000" b="1">
+                          <a:solidFill>
+                            <a:srgbClr val="111111"/>
+                          </a:solidFill>
+                          <a:latin typeface="맑은 고딕"/>
+                        </a:rPr>
+                        <a:t>68,750,000</a:t>
+                      </a:r>
+                    </a:p>
+                  </a:txBody>
+                  <a:tcPr marL="50800" marR="50800" marT="12700" marB="12700" anchor="ctr">
+                    <a:solidFill>
+                      <a:srgbClr val="FFFFFF"/>
+                    </a:solidFill>
+                  </a:tcPr>
+                </a:tc>
+              </a:tr>
+              <a:tr h="246888">
+                <a:tc>
+                  <a:txBody>
+                    <a:bodyPr wrap="square"/>
+                    <a:lstStyle/>
+                    <a:p>
+                      <a:pPr algn="l"/>
+                      <a:r>
+                        <a:rPr sz="950" b="0">
+                          <a:solidFill>
+                            <a:srgbClr val="111111"/>
+                          </a:solidFill>
+                          <a:latin typeface="맑은 고딕"/>
+                        </a:rPr>
+                        <a:t>KOL 무가시딩</a:t>
+                      </a:r>
+                    </a:p>
+                  </a:txBody>
+                  <a:tcPr marL="50800" marR="50800" marT="12700" marB="12700" anchor="ctr">
+                    <a:solidFill>
+                      <a:srgbClr val="FFFFFF"/>
+                    </a:solidFill>
+                  </a:tcPr>
+                </a:tc>
+                <a:tc>
+                  <a:txBody>
+                    <a:bodyPr wrap="square"/>
+                    <a:lstStyle/>
+                    <a:p>
+                      <a:pPr algn="ctr"/>
+                      <a:r>
+                        <a:rPr sz="900" b="0">
+                          <a:solidFill>
+                            <a:srgbClr val="333333"/>
+                          </a:solidFill>
+                          <a:latin typeface="맑은 고딕"/>
+                        </a:rPr>
+                        <a:t>60</a:t>
+                      </a:r>
+                    </a:p>
+                  </a:txBody>
+                  <a:tcPr marL="50800" marR="50800" marT="12700" marB="12700" anchor="ctr">
+                    <a:solidFill>
+                      <a:srgbClr val="FFFFFF"/>
+                    </a:solidFill>
+                  </a:tcPr>
+                </a:tc>
+                <a:tc>
+                  <a:txBody>
+                    <a:bodyPr wrap="square"/>
+                    <a:lstStyle/>
+                    <a:p>
+                      <a:pPr algn="ctr"/>
+                      <a:r>
+                        <a:rPr sz="900" b="0">
+                          <a:solidFill>
+                            <a:srgbClr val="333333"/>
+                          </a:solidFill>
+                          <a:latin typeface="맑은 고딕"/>
+                        </a:rPr>
+                        <a:t>100,000</a:t>
+                      </a:r>
+                    </a:p>
+                  </a:txBody>
+                  <a:tcPr marL="50800" marR="50800" marT="12700" marB="12700" anchor="ctr">
+                    <a:solidFill>
+                      <a:srgbClr val="FFFFFF"/>
+                    </a:solidFill>
+                  </a:tcPr>
+                </a:tc>
+                <a:tc>
+                  <a:txBody>
+                    <a:bodyPr wrap="square"/>
+                    <a:lstStyle/>
+                    <a:p>
+                      <a:pPr algn="r"/>
+                      <a:r>
+                        <a:rPr sz="1000" b="1">
+                          <a:solidFill>
+                            <a:srgbClr val="111111"/>
+                          </a:solidFill>
+                          <a:latin typeface="맑은 고딕"/>
+                        </a:rPr>
+                        <a:t>6,000,000</a:t>
+                      </a:r>
+                    </a:p>
+                  </a:txBody>
+                  <a:tcPr marL="50800" marR="50800" marT="12700" marB="12700" anchor="ctr">
+                    <a:solidFill>
+                      <a:srgbClr val="FFFFFF"/>
+                    </a:solidFill>
+                  </a:tcPr>
+                </a:tc>
+              </a:tr>
+              <a:tr h="246888">
+                <a:tc>
+                  <a:txBody>
+                    <a:bodyPr wrap="square"/>
+                    <a:lstStyle/>
+                    <a:p>
+                      <a:pPr algn="l"/>
+                      <a:r>
+                        <a:rPr sz="950" b="0">
+                          <a:solidFill>
+                            <a:srgbClr val="111111"/>
+                          </a:solidFill>
+                          <a:latin typeface="맑은 고딕"/>
+                        </a:rPr>
+                        <a:t>X (트위터) 시딩</a:t>
+                      </a:r>
+                    </a:p>
+                  </a:txBody>
+                  <a:tcPr marL="50800" marR="50800" marT="12700" marB="12700" anchor="ctr">
+                    <a:solidFill>
+                      <a:srgbClr val="FFFFFF"/>
+                    </a:solidFill>
+                  </a:tcPr>
+                </a:tc>
+                <a:tc>
+                  <a:txBody>
+                    <a:bodyPr wrap="square"/>
+                    <a:lstStyle/>
+                    <a:p>
+                      <a:pPr algn="ctr"/>
+                      <a:r>
+                        <a:rPr sz="900" b="0">
+                          <a:solidFill>
+                            <a:srgbClr val="333333"/>
+                          </a:solidFill>
+                          <a:latin typeface="맑은 고딕"/>
+                        </a:rPr>
+                        <a:t>15</a:t>
+                      </a:r>
+                    </a:p>
+                  </a:txBody>
+                  <a:tcPr marL="50800" marR="50800" marT="12700" marB="12700" anchor="ctr">
+                    <a:solidFill>
+                      <a:srgbClr val="FFFFFF"/>
+                    </a:solidFill>
+                  </a:tcPr>
+                </a:tc>
+                <a:tc>
+                  <a:txBody>
+                    <a:bodyPr wrap="square"/>
+                    <a:lstStyle/>
+                    <a:p>
+                      <a:pPr algn="ctr"/>
+                      <a:r>
+                        <a:rPr sz="900" b="0">
+                          <a:solidFill>
+                            <a:srgbClr val="333333"/>
+                          </a:solidFill>
+                          <a:latin typeface="맑은 고딕"/>
+                        </a:rPr>
+                        <a:t>500,000</a:t>
+                      </a:r>
+                    </a:p>
+                  </a:txBody>
+                  <a:tcPr marL="50800" marR="50800" marT="12700" marB="12700" anchor="ctr">
+                    <a:solidFill>
+                      <a:srgbClr val="FFFFFF"/>
+                    </a:solidFill>
+                  </a:tcPr>
+                </a:tc>
+                <a:tc>
+                  <a:txBody>
+                    <a:bodyPr wrap="square"/>
+                    <a:lstStyle/>
+                    <a:p>
+                      <a:pPr algn="r"/>
+                      <a:r>
+                        <a:rPr sz="1000" b="1">
+                          <a:solidFill>
+                            <a:srgbClr val="111111"/>
+                          </a:solidFill>
+                          <a:latin typeface="맑은 고딕"/>
+                        </a:rPr>
+                        <a:t>7,500,000</a:t>
                       </a:r>
                     </a:p>
                   </a:txBody>
@@ -7081,7 +7457,7 @@
                           </a:solidFill>
                           <a:latin typeface="맑은 고딕"/>
                         </a:rPr>
-                        <a:t>크리에이터 시딩</a:t>
+                        <a:t>콘텐츠 · 바이럴</a:t>
                       </a:r>
                     </a:p>
                   </a:txBody>
@@ -7130,7 +7506,7 @@
                           </a:solidFill>
                           <a:latin typeface="맑은 고딕"/>
                         </a:rPr>
-                        <a:t>매크로 (인스타·유튜브)</a:t>
+                        <a:t>파워페이지 콘텐츠 바이럴</a:t>
                       </a:r>
                     </a:p>
                   </a:txBody>
@@ -7153,7 +7529,7 @@
                           </a:solidFill>
                           <a:latin typeface="맑은 고딕"/>
                         </a:rPr>
-                        <a:t>15</a:t>
+                        <a:t>9</a:t>
                       </a:r>
                     </a:p>
                   </a:txBody>
@@ -7176,7 +7552,7 @@
                           </a:solidFill>
                           <a:latin typeface="맑은 고딕"/>
                         </a:rPr>
-                        <a:t>800,000</a:t>
+                        <a:t>600,000</a:t>
                       </a:r>
                     </a:p>
                   </a:txBody>
@@ -7199,7 +7575,7 @@
                           </a:solidFill>
                           <a:latin typeface="맑은 고딕"/>
                         </a:rPr>
-                        <a:t>12,000,000</a:t>
+                        <a:t>5,400,000</a:t>
                       </a:r>
                     </a:p>
                   </a:txBody>
@@ -7224,7 +7600,7 @@
                           </a:solidFill>
                           <a:latin typeface="맑은 고딕"/>
                         </a:rPr>
-                        <a:t>마이크로</a:t>
+                        <a:t>커뮤니티 체험단 (탑 3건)</a:t>
                       </a:r>
                     </a:p>
                   </a:txBody>
@@ -7247,7 +7623,7 @@
                           </a:solidFill>
                           <a:latin typeface="맑은 고딕"/>
                         </a:rPr>
-                        <a:t>150</a:t>
+                        <a:t>3</a:t>
                       </a:r>
                     </a:p>
                   </a:txBody>
@@ -7270,7 +7646,7 @@
                           </a:solidFill>
                           <a:latin typeface="맑은 고딕"/>
                         </a:rPr>
-                        <a:t>400,000</a:t>
+                        <a:t>5,000,000</a:t>
                       </a:r>
                     </a:p>
                   </a:txBody>
@@ -7293,7 +7669,7 @@
                           </a:solidFill>
                           <a:latin typeface="맑은 고딕"/>
                         </a:rPr>
-                        <a:t>60,000,000</a:t>
+                        <a:t>15,000,000</a:t>
                       </a:r>
                     </a:p>
                   </a:txBody>
@@ -7318,7 +7694,7 @@
                           </a:solidFill>
                           <a:latin typeface="맑은 고딕"/>
                         </a:rPr>
-                        <a:t>나노</a:t>
+                        <a:t>네이버 블로그</a:t>
                       </a:r>
                     </a:p>
                   </a:txBody>
@@ -7341,7 +7717,7 @@
                           </a:solidFill>
                           <a:latin typeface="맑은 고딕"/>
                         </a:rPr>
-                        <a:t>175</a:t>
+                        <a:t>15</a:t>
                       </a:r>
                     </a:p>
                   </a:txBody>
@@ -7387,195 +7763,7 @@
                           </a:solidFill>
                           <a:latin typeface="맑은 고딕"/>
                         </a:rPr>
-                        <a:t>43,750,000</a:t>
-                      </a:r>
-                    </a:p>
-                  </a:txBody>
-                  <a:tcPr marL="50800" marR="50800" marT="12700" marB="12700" anchor="ctr">
-                    <a:solidFill>
-                      <a:srgbClr val="FFFFFF"/>
-                    </a:solidFill>
-                  </a:tcPr>
-                </a:tc>
-              </a:tr>
-              <a:tr h="246888">
-                <a:tc>
-                  <a:txBody>
-                    <a:bodyPr wrap="square"/>
-                    <a:lstStyle/>
-                    <a:p>
-                      <a:pPr algn="l"/>
-                      <a:r>
-                        <a:rPr sz="950" b="0">
-                          <a:solidFill>
-                            <a:srgbClr val="111111"/>
-                          </a:solidFill>
-                          <a:latin typeface="맑은 고딕"/>
-                        </a:rPr>
-                        <a:t>KOL 무가시딩  *자체 비용 0</a:t>
-                      </a:r>
-                    </a:p>
-                  </a:txBody>
-                  <a:tcPr marL="50800" marR="50800" marT="12700" marB="12700" anchor="ctr">
-                    <a:solidFill>
-                      <a:srgbClr val="FFFFFF"/>
-                    </a:solidFill>
-                  </a:tcPr>
-                </a:tc>
-                <a:tc>
-                  <a:txBody>
-                    <a:bodyPr wrap="square"/>
-                    <a:lstStyle/>
-                    <a:p>
-                      <a:pPr algn="ctr"/>
-                      <a:r>
-                        <a:rPr sz="900" b="0">
-                          <a:solidFill>
-                            <a:srgbClr val="333333"/>
-                          </a:solidFill>
-                          <a:latin typeface="맑은 고딕"/>
-                        </a:rPr>
-                        <a:t>60</a:t>
-                      </a:r>
-                    </a:p>
-                  </a:txBody>
-                  <a:tcPr marL="50800" marR="50800" marT="12700" marB="12700" anchor="ctr">
-                    <a:solidFill>
-                      <a:srgbClr val="FFFFFF"/>
-                    </a:solidFill>
-                  </a:tcPr>
-                </a:tc>
-                <a:tc>
-                  <a:txBody>
-                    <a:bodyPr wrap="square"/>
-                    <a:lstStyle/>
-                    <a:p>
-                      <a:pPr algn="ctr"/>
-                      <a:r>
-                        <a:rPr sz="900" b="0">
-                          <a:solidFill>
-                            <a:srgbClr val="333333"/>
-                          </a:solidFill>
-                          <a:latin typeface="맑은 고딕"/>
-                        </a:rPr>
-                        <a:t>무가</a:t>
-                      </a:r>
-                    </a:p>
-                  </a:txBody>
-                  <a:tcPr marL="50800" marR="50800" marT="12700" marB="12700" anchor="ctr">
-                    <a:solidFill>
-                      <a:srgbClr val="FFFFFF"/>
-                    </a:solidFill>
-                  </a:tcPr>
-                </a:tc>
-                <a:tc>
-                  <a:txBody>
-                    <a:bodyPr wrap="square"/>
-                    <a:lstStyle/>
-                    <a:p>
-                      <a:pPr algn="r"/>
-                      <a:r>
-                        <a:rPr sz="1000" b="0">
-                          <a:solidFill>
-                            <a:srgbClr val="707070"/>
-                          </a:solidFill>
-                          <a:latin typeface="맑은 고딕"/>
-                        </a:rPr>
-                        <a:t>0</a:t>
-                      </a:r>
-                    </a:p>
-                  </a:txBody>
-                  <a:tcPr marL="50800" marR="50800" marT="12700" marB="12700" anchor="ctr">
-                    <a:solidFill>
-                      <a:srgbClr val="FFFFFF"/>
-                    </a:solidFill>
-                  </a:tcPr>
-                </a:tc>
-              </a:tr>
-              <a:tr h="246888">
-                <a:tc>
-                  <a:txBody>
-                    <a:bodyPr wrap="square"/>
-                    <a:lstStyle/>
-                    <a:p>
-                      <a:pPr algn="l"/>
-                      <a:r>
-                        <a:rPr sz="950" b="0">
-                          <a:solidFill>
-                            <a:srgbClr val="111111"/>
-                          </a:solidFill>
-                          <a:latin typeface="맑은 고딕"/>
-                        </a:rPr>
-                        <a:t>X (트위터) 시딩</a:t>
-                      </a:r>
-                    </a:p>
-                  </a:txBody>
-                  <a:tcPr marL="50800" marR="50800" marT="12700" marB="12700" anchor="ctr">
-                    <a:solidFill>
-                      <a:srgbClr val="FFFFFF"/>
-                    </a:solidFill>
-                  </a:tcPr>
-                </a:tc>
-                <a:tc>
-                  <a:txBody>
-                    <a:bodyPr wrap="square"/>
-                    <a:lstStyle/>
-                    <a:p>
-                      <a:pPr algn="ctr"/>
-                      <a:r>
-                        <a:rPr sz="900" b="0">
-                          <a:solidFill>
-                            <a:srgbClr val="333333"/>
-                          </a:solidFill>
-                          <a:latin typeface="맑은 고딕"/>
-                        </a:rPr>
-                        <a:t>15</a:t>
-                      </a:r>
-                    </a:p>
-                  </a:txBody>
-                  <a:tcPr marL="50800" marR="50800" marT="12700" marB="12700" anchor="ctr">
-                    <a:solidFill>
-                      <a:srgbClr val="FFFFFF"/>
-                    </a:solidFill>
-                  </a:tcPr>
-                </a:tc>
-                <a:tc>
-                  <a:txBody>
-                    <a:bodyPr wrap="square"/>
-                    <a:lstStyle/>
-                    <a:p>
-                      <a:pPr algn="ctr"/>
-                      <a:r>
-                        <a:rPr sz="900" b="0">
-                          <a:solidFill>
-                            <a:srgbClr val="333333"/>
-                          </a:solidFill>
-                          <a:latin typeface="맑은 고딕"/>
-                        </a:rPr>
-                        <a:t>500,000</a:t>
-                      </a:r>
-                    </a:p>
-                  </a:txBody>
-                  <a:tcPr marL="50800" marR="50800" marT="12700" marB="12700" anchor="ctr">
-                    <a:solidFill>
-                      <a:srgbClr val="FFFFFF"/>
-                    </a:solidFill>
-                  </a:tcPr>
-                </a:tc>
-                <a:tc>
-                  <a:txBody>
-                    <a:bodyPr wrap="square"/>
-                    <a:lstStyle/>
-                    <a:p>
-                      <a:pPr algn="r"/>
-                      <a:r>
-                        <a:rPr sz="1000" b="1">
-                          <a:solidFill>
-                            <a:srgbClr val="111111"/>
-                          </a:solidFill>
-                          <a:latin typeface="맑은 고딕"/>
-                        </a:rPr>
-                        <a:t>7,500,000</a:t>
+                        <a:t>3,750,000</a:t>
                       </a:r>
                     </a:p>
                   </a:txBody>
@@ -7600,7 +7788,7 @@
                           </a:solidFill>
                           <a:latin typeface="맑은 고딕"/>
                         </a:rPr>
-                        <a:t>콘텐츠 · 바이럴</a:t>
+                        <a:t>기타</a:t>
                       </a:r>
                     </a:p>
                   </a:txBody>
@@ -7649,338 +7837,7 @@
                           </a:solidFill>
                           <a:latin typeface="맑은 고딕"/>
                         </a:rPr>
-                        <a:t>파워페이지 콘텐츠 바이럴</a:t>
-                      </a:r>
-                    </a:p>
-                  </a:txBody>
-                  <a:tcPr marL="50800" marR="50800" marT="12700" marB="12700" anchor="ctr">
-                    <a:solidFill>
-                      <a:srgbClr val="FFFFFF"/>
-                    </a:solidFill>
-                  </a:tcPr>
-                </a:tc>
-                <a:tc>
-                  <a:txBody>
-                    <a:bodyPr wrap="square"/>
-                    <a:lstStyle/>
-                    <a:p>
-                      <a:pPr algn="ctr"/>
-                      <a:r>
-                        <a:rPr sz="900" b="0">
-                          <a:solidFill>
-                            <a:srgbClr val="333333"/>
-                          </a:solidFill>
-                          <a:latin typeface="맑은 고딕"/>
-                        </a:rPr>
-                        <a:t>9</a:t>
-                      </a:r>
-                    </a:p>
-                  </a:txBody>
-                  <a:tcPr marL="50800" marR="50800" marT="12700" marB="12700" anchor="ctr">
-                    <a:solidFill>
-                      <a:srgbClr val="FFFFFF"/>
-                    </a:solidFill>
-                  </a:tcPr>
-                </a:tc>
-                <a:tc>
-                  <a:txBody>
-                    <a:bodyPr wrap="square"/>
-                    <a:lstStyle/>
-                    <a:p>
-                      <a:pPr algn="ctr"/>
-                      <a:r>
-                        <a:rPr sz="900" b="0">
-                          <a:solidFill>
-                            <a:srgbClr val="333333"/>
-                          </a:solidFill>
-                          <a:latin typeface="맑은 고딕"/>
-                        </a:rPr>
-                        <a:t>600,000</a:t>
-                      </a:r>
-                    </a:p>
-                  </a:txBody>
-                  <a:tcPr marL="50800" marR="50800" marT="12700" marB="12700" anchor="ctr">
-                    <a:solidFill>
-                      <a:srgbClr val="FFFFFF"/>
-                    </a:solidFill>
-                  </a:tcPr>
-                </a:tc>
-                <a:tc>
-                  <a:txBody>
-                    <a:bodyPr wrap="square"/>
-                    <a:lstStyle/>
-                    <a:p>
-                      <a:pPr algn="r"/>
-                      <a:r>
-                        <a:rPr sz="1000" b="1">
-                          <a:solidFill>
-                            <a:srgbClr val="111111"/>
-                          </a:solidFill>
-                          <a:latin typeface="맑은 고딕"/>
-                        </a:rPr>
-                        <a:t>5,400,000</a:t>
-                      </a:r>
-                    </a:p>
-                  </a:txBody>
-                  <a:tcPr marL="50800" marR="50800" marT="12700" marB="12700" anchor="ctr">
-                    <a:solidFill>
-                      <a:srgbClr val="FFFFFF"/>
-                    </a:solidFill>
-                  </a:tcPr>
-                </a:tc>
-              </a:tr>
-              <a:tr h="246888">
-                <a:tc>
-                  <a:txBody>
-                    <a:bodyPr wrap="square"/>
-                    <a:lstStyle/>
-                    <a:p>
-                      <a:pPr algn="l"/>
-                      <a:r>
-                        <a:rPr sz="950" b="0">
-                          <a:solidFill>
-                            <a:srgbClr val="111111"/>
-                          </a:solidFill>
-                          <a:latin typeface="맑은 고딕"/>
-                        </a:rPr>
-                        <a:t>커뮤니티 체험단 (탑1·로2)</a:t>
-                      </a:r>
-                    </a:p>
-                  </a:txBody>
-                  <a:tcPr marL="50800" marR="50800" marT="12700" marB="12700" anchor="ctr">
-                    <a:solidFill>
-                      <a:srgbClr val="FFFFFF"/>
-                    </a:solidFill>
-                  </a:tcPr>
-                </a:tc>
-                <a:tc>
-                  <a:txBody>
-                    <a:bodyPr wrap="square"/>
-                    <a:lstStyle/>
-                    <a:p>
-                      <a:pPr algn="ctr"/>
-                      <a:r>
-                        <a:rPr sz="900" b="0">
-                          <a:solidFill>
-                            <a:srgbClr val="333333"/>
-                          </a:solidFill>
-                          <a:latin typeface="맑은 고딕"/>
-                        </a:rPr>
-                        <a:t>3</a:t>
-                      </a:r>
-                    </a:p>
-                  </a:txBody>
-                  <a:tcPr marL="50800" marR="50800" marT="12700" marB="12700" anchor="ctr">
-                    <a:solidFill>
-                      <a:srgbClr val="FFFFFF"/>
-                    </a:solidFill>
-                  </a:tcPr>
-                </a:tc>
-                <a:tc>
-                  <a:txBody>
-                    <a:bodyPr wrap="square"/>
-                    <a:lstStyle/>
-                    <a:p>
-                      <a:pPr algn="ctr"/>
-                      <a:r>
-                        <a:rPr sz="900" b="0">
-                          <a:solidFill>
-                            <a:srgbClr val="333333"/>
-                          </a:solidFill>
-                          <a:latin typeface="맑은 고딕"/>
-                        </a:rPr>
-                        <a:t>500/200만</a:t>
-                      </a:r>
-                    </a:p>
-                  </a:txBody>
-                  <a:tcPr marL="50800" marR="50800" marT="12700" marB="12700" anchor="ctr">
-                    <a:solidFill>
-                      <a:srgbClr val="FFFFFF"/>
-                    </a:solidFill>
-                  </a:tcPr>
-                </a:tc>
-                <a:tc>
-                  <a:txBody>
-                    <a:bodyPr wrap="square"/>
-                    <a:lstStyle/>
-                    <a:p>
-                      <a:pPr algn="r"/>
-                      <a:r>
-                        <a:rPr sz="1000" b="1">
-                          <a:solidFill>
-                            <a:srgbClr val="111111"/>
-                          </a:solidFill>
-                          <a:latin typeface="맑은 고딕"/>
-                        </a:rPr>
-                        <a:t>9,000,000</a:t>
-                      </a:r>
-                    </a:p>
-                  </a:txBody>
-                  <a:tcPr marL="50800" marR="50800" marT="12700" marB="12700" anchor="ctr">
-                    <a:solidFill>
-                      <a:srgbClr val="FFFFFF"/>
-                    </a:solidFill>
-                  </a:tcPr>
-                </a:tc>
-              </a:tr>
-              <a:tr h="246888">
-                <a:tc>
-                  <a:txBody>
-                    <a:bodyPr wrap="square"/>
-                    <a:lstStyle/>
-                    <a:p>
-                      <a:pPr algn="l"/>
-                      <a:r>
-                        <a:rPr sz="950" b="0">
-                          <a:solidFill>
-                            <a:srgbClr val="111111"/>
-                          </a:solidFill>
-                          <a:latin typeface="맑은 고딕"/>
-                        </a:rPr>
-                        <a:t>네이버 블로그</a:t>
-                      </a:r>
-                    </a:p>
-                  </a:txBody>
-                  <a:tcPr marL="50800" marR="50800" marT="12700" marB="12700" anchor="ctr">
-                    <a:solidFill>
-                      <a:srgbClr val="FFFFFF"/>
-                    </a:solidFill>
-                  </a:tcPr>
-                </a:tc>
-                <a:tc>
-                  <a:txBody>
-                    <a:bodyPr wrap="square"/>
-                    <a:lstStyle/>
-                    <a:p>
-                      <a:pPr algn="ctr"/>
-                      <a:r>
-                        <a:rPr sz="900" b="0">
-                          <a:solidFill>
-                            <a:srgbClr val="333333"/>
-                          </a:solidFill>
-                          <a:latin typeface="맑은 고딕"/>
-                        </a:rPr>
-                        <a:t>15</a:t>
-                      </a:r>
-                    </a:p>
-                  </a:txBody>
-                  <a:tcPr marL="50800" marR="50800" marT="12700" marB="12700" anchor="ctr">
-                    <a:solidFill>
-                      <a:srgbClr val="FFFFFF"/>
-                    </a:solidFill>
-                  </a:tcPr>
-                </a:tc>
-                <a:tc>
-                  <a:txBody>
-                    <a:bodyPr wrap="square"/>
-                    <a:lstStyle/>
-                    <a:p>
-                      <a:pPr algn="ctr"/>
-                      <a:r>
-                        <a:rPr sz="900" b="0">
-                          <a:solidFill>
-                            <a:srgbClr val="333333"/>
-                          </a:solidFill>
-                          <a:latin typeface="맑은 고딕"/>
-                        </a:rPr>
-                        <a:t>250,000</a:t>
-                      </a:r>
-                    </a:p>
-                  </a:txBody>
-                  <a:tcPr marL="50800" marR="50800" marT="12700" marB="12700" anchor="ctr">
-                    <a:solidFill>
-                      <a:srgbClr val="FFFFFF"/>
-                    </a:solidFill>
-                  </a:tcPr>
-                </a:tc>
-                <a:tc>
-                  <a:txBody>
-                    <a:bodyPr wrap="square"/>
-                    <a:lstStyle/>
-                    <a:p>
-                      <a:pPr algn="r"/>
-                      <a:r>
-                        <a:rPr sz="1000" b="1">
-                          <a:solidFill>
-                            <a:srgbClr val="111111"/>
-                          </a:solidFill>
-                          <a:latin typeface="맑은 고딕"/>
-                        </a:rPr>
-                        <a:t>3,750,000</a:t>
-                      </a:r>
-                    </a:p>
-                  </a:txBody>
-                  <a:tcPr marL="50800" marR="50800" marT="12700" marB="12700" anchor="ctr">
-                    <a:solidFill>
-                      <a:srgbClr val="FFFFFF"/>
-                    </a:solidFill>
-                  </a:tcPr>
-                </a:tc>
-              </a:tr>
-              <a:tr h="246888">
-                <a:tc gridSpan="4">
-                  <a:txBody>
-                    <a:bodyPr wrap="square"/>
-                    <a:lstStyle/>
-                    <a:p>
-                      <a:pPr algn="l"/>
-                      <a:r>
-                        <a:rPr sz="950" b="1">
-                          <a:solidFill>
-                            <a:srgbClr val="111111"/>
-                          </a:solidFill>
-                          <a:latin typeface="맑은 고딕"/>
-                        </a:rPr>
-                        <a:t>기타</a:t>
-                      </a:r>
-                    </a:p>
-                  </a:txBody>
-                  <a:tcPr marL="50800" marR="50800" marT="12700" marB="12700" anchor="ctr">
-                    <a:solidFill>
-                      <a:srgbClr val="EDEDED"/>
-                    </a:solidFill>
-                  </a:tcPr>
-                </a:tc>
-                <a:tc hMerge="1">
-                  <a:txBody>
-                    <a:bodyPr/>
-                    <a:lstStyle/>
-                    <a:p/>
-                  </a:txBody>
-                  <a:tcPr/>
-                </a:tc>
-                <a:tc hMerge="1">
-                  <a:txBody>
-                    <a:bodyPr/>
-                    <a:lstStyle/>
-                    <a:p/>
-                  </a:txBody>
-                  <a:tcPr/>
-                </a:tc>
-                <a:tc hMerge="1">
-                  <a:txBody>
-                    <a:bodyPr/>
-                    <a:lstStyle/>
-                    <a:p/>
-                  </a:txBody>
-                  <a:tcPr/>
-                </a:tc>
-              </a:tr>
-              <a:tr h="246888">
-                <a:tc>
-                  <a:txBody>
-                    <a:bodyPr wrap="square"/>
-                    <a:lstStyle/>
-                    <a:p>
-                      <a:pPr algn="l"/>
-                      <a:r>
-                        <a:rPr sz="950" b="0">
-                          <a:solidFill>
-                            <a:srgbClr val="111111"/>
-                          </a:solidFill>
-                          <a:latin typeface="맑은 고딕"/>
-                        </a:rPr>
-                        <a:t>어필리에이트 (올영 쇼핑 큐레이터)  *올영 부담</a:t>
+                        <a:t>어필리에이트 (올영 쇼핑 큐레이터)</a:t>
                       </a:r>
                     </a:p>
                   </a:txBody>
@@ -8113,7 +7970,7 @@
                           </a:solidFill>
                           <a:latin typeface="맑은 고딕"/>
                         </a:rPr>
-                        <a:t>250,000,000</a:t>
+                        <a:t>262,000,000</a:t>
                       </a:r>
                     </a:p>
                   </a:txBody>
@@ -8177,7 +8034,7 @@
                           </a:solidFill>
                           <a:latin typeface="맑은 고딕"/>
                         </a:rPr>
-                        <a:t>25,000,000</a:t>
+                        <a:t>26,200,000</a:t>
                       </a:r>
                     </a:p>
                   </a:txBody>
@@ -8241,7 +8098,7 @@
                           </a:solidFill>
                           <a:latin typeface="맑은 고딕"/>
                         </a:rPr>
-                        <a:t>275,000,000</a:t>
+                        <a:t>288,200,000</a:t>
                       </a:r>
                     </a:p>
                   </a:txBody>
@@ -8285,7 +8142,7 @@
                 </a:solidFill>
                 <a:latin typeface="맑은 고딕"/>
               </a:rPr>
-              <a:t>· 프로젝트 대행료 10%(2,500만), 차액은 제작비에 반영 · EGC 콘텐츠는 건당 1,500,000원 별도 산정 · 공급가액 2.5억(VAT 별도)</a:t>
+              <a:t>· 프로젝트 대행료 항목 제외, 해당 예산(2,500만)은 크리에이터 나노 시딩에 반영 · EGC 콘텐츠는 건당 1,500,000원 별도 산정</a:t>
             </a:r>
           </a:p>
           <a:p>
@@ -8296,7 +8153,7 @@
                 </a:solidFill>
                 <a:latin typeface="맑은 고딕"/>
               </a:rPr>
-              <a:t>· 퍼포먼스 매체 운영(PA·올영 인앱)은 별도 산정(별첨) · KOL 무가시딩·어필리에이트는 올영 부담/무가로 0원 · 단가는 인스타·유튜브 기준, X 별도</a:t>
+              <a:t>· 퍼포먼스 매체 운영(PA·올영 인앱)은 별도 산정(별첨) · 인플루언서 단가는 인스타·유튜브 기준, X(트위터)는 별도 단가</a:t>
             </a:r>
           </a:p>
         </p:txBody>

--- a/proposal/올더베러_액션플랜_견적서_편집용.pptx
+++ b/proposal/올더베러_액션플랜_견적서_편집용.pptx
@@ -4048,13 +4048,13 @@
                           </a:solidFill>
                           <a:latin typeface="맑은 고딕"/>
                         </a:rPr>
-                        <a:t>30</a:t>
-                      </a:r>
-                    </a:p>
-                  </a:txBody>
-                  <a:tcPr marL="50800" marR="50800" marT="12700" marB="12700" anchor="ctr">
-                    <a:solidFill>
-                      <a:srgbClr val="B2B2B2"/>
+                        <a:t>25</a:t>
+                      </a:r>
+                    </a:p>
+                  </a:txBody>
+                  <a:tcPr marL="50800" marR="50800" marT="12700" marB="12700" anchor="ctr">
+                    <a:solidFill>
+                      <a:srgbClr val="B3B3B3"/>
                     </a:solidFill>
                   </a:tcPr>
                 </a:tc>
@@ -4071,7 +4071,7 @@
                           </a:solidFill>
                           <a:latin typeface="맑은 고딕"/>
                         </a:rPr>
-                        <a:t>65</a:t>
+                        <a:t>55</a:t>
                       </a:r>
                     </a:p>
                   </a:txBody>
@@ -4094,13 +4094,59 @@
                           </a:solidFill>
                           <a:latin typeface="맑은 고딕"/>
                         </a:rPr>
+                        <a:t>35</a:t>
+                      </a:r>
+                    </a:p>
+                  </a:txBody>
+                  <a:tcPr marL="50800" marR="50800" marT="12700" marB="12700" anchor="ctr">
+                    <a:solidFill>
+                      <a:srgbClr val="959595"/>
+                    </a:solidFill>
+                  </a:tcPr>
+                </a:tc>
+                <a:tc>
+                  <a:txBody>
+                    <a:bodyPr wrap="square"/>
+                    <a:lstStyle/>
+                    <a:p>
+                      <a:pPr algn="ctr"/>
+                      <a:r>
+                        <a:rPr sz="1100" b="1">
+                          <a:solidFill>
+                            <a:srgbClr val="111111"/>
+                          </a:solidFill>
+                          <a:latin typeface="맑은 고딕"/>
+                        </a:rPr>
+                        <a:t>25</a:t>
+                      </a:r>
+                    </a:p>
+                  </a:txBody>
+                  <a:tcPr marL="50800" marR="50800" marT="12700" marB="12700" anchor="ctr">
+                    <a:solidFill>
+                      <a:srgbClr val="B3B3B3"/>
+                    </a:solidFill>
+                  </a:tcPr>
+                </a:tc>
+                <a:tc>
+                  <a:txBody>
+                    <a:bodyPr wrap="square"/>
+                    <a:lstStyle/>
+                    <a:p>
+                      <a:pPr algn="ctr"/>
+                      <a:r>
+                        <a:rPr sz="1100" b="1">
+                          <a:solidFill>
+                            <a:srgbClr val="FFFFFF"/>
+                          </a:solidFill>
+                          <a:latin typeface="맑은 고딕"/>
+                        </a:rPr>
                         <a:t>40</a:t>
                       </a:r>
                     </a:p>
                   </a:txBody>
                   <a:tcPr marL="50800" marR="50800" marT="12700" marB="12700" anchor="ctr">
                     <a:solidFill>
-                      <a:srgbClr val="989898"/>
+                      <a:srgbClr val="858585"/>
                     </a:solidFill>
                   </a:tcPr>
                 </a:tc>
@@ -4113,80 +4159,34 @@
                       <a:r>
                         <a:rPr sz="1100" b="1">
                           <a:solidFill>
+                            <a:srgbClr val="FFFFFF"/>
+                          </a:solidFill>
+                          <a:latin typeface="맑은 고딕"/>
+                        </a:rPr>
+                        <a:t>45</a:t>
+                      </a:r>
+                    </a:p>
+                  </a:txBody>
+                  <a:tcPr marL="50800" marR="50800" marT="12700" marB="12700" anchor="ctr">
+                    <a:solidFill>
+                      <a:srgbClr val="767676"/>
+                    </a:solidFill>
+                  </a:tcPr>
+                </a:tc>
+                <a:tc>
+                  <a:txBody>
+                    <a:bodyPr wrap="square"/>
+                    <a:lstStyle/>
+                    <a:p>
+                      <a:pPr algn="ctr"/>
+                      <a:r>
+                        <a:rPr sz="950" b="1">
+                          <a:solidFill>
                             <a:srgbClr val="111111"/>
                           </a:solidFill>
                           <a:latin typeface="맑은 고딕"/>
                         </a:rPr>
-                        <a:t>30</a:t>
-                      </a:r>
-                    </a:p>
-                  </a:txBody>
-                  <a:tcPr marL="50800" marR="50800" marT="12700" marB="12700" anchor="ctr">
-                    <a:solidFill>
-                      <a:srgbClr val="B2B2B2"/>
-                    </a:solidFill>
-                  </a:tcPr>
-                </a:tc>
-                <a:tc>
-                  <a:txBody>
-                    <a:bodyPr wrap="square"/>
-                    <a:lstStyle/>
-                    <a:p>
-                      <a:pPr algn="ctr"/>
-                      <a:r>
-                        <a:rPr sz="1100" b="1">
-                          <a:solidFill>
-                            <a:srgbClr val="FFFFFF"/>
-                          </a:solidFill>
-                          <a:latin typeface="맑은 고딕"/>
-                        </a:rPr>
-                        <a:t>50</a:t>
-                      </a:r>
-                    </a:p>
-                  </a:txBody>
-                  <a:tcPr marL="50800" marR="50800" marT="12700" marB="12700" anchor="ctr">
-                    <a:solidFill>
-                      <a:srgbClr val="7E7E7E"/>
-                    </a:solidFill>
-                  </a:tcPr>
-                </a:tc>
-                <a:tc>
-                  <a:txBody>
-                    <a:bodyPr wrap="square"/>
-                    <a:lstStyle/>
-                    <a:p>
-                      <a:pPr algn="ctr"/>
-                      <a:r>
-                        <a:rPr sz="1100" b="1">
-                          <a:solidFill>
-                            <a:srgbClr val="FFFFFF"/>
-                          </a:solidFill>
-                          <a:latin typeface="맑은 고딕"/>
-                        </a:rPr>
-                        <a:t>60</a:t>
-                      </a:r>
-                    </a:p>
-                  </a:txBody>
-                  <a:tcPr marL="50800" marR="50800" marT="12700" marB="12700" anchor="ctr">
-                    <a:solidFill>
-                      <a:srgbClr val="646464"/>
-                    </a:solidFill>
-                  </a:tcPr>
-                </a:tc>
-                <a:tc>
-                  <a:txBody>
-                    <a:bodyPr wrap="square"/>
-                    <a:lstStyle/>
-                    <a:p>
-                      <a:pPr algn="ctr"/>
-                      <a:r>
-                        <a:rPr sz="950" b="1">
-                          <a:solidFill>
-                            <a:srgbClr val="111111"/>
-                          </a:solidFill>
-                          <a:latin typeface="맑은 고딕"/>
-                        </a:rPr>
-                        <a:t>275</a:t>
+                        <a:t>225</a:t>
                       </a:r>
                     </a:p>
                   </a:txBody>
@@ -4700,7 +4700,7 @@
                           </a:solidFill>
                           <a:latin typeface="맑은 고딕"/>
                         </a:rPr>
-                        <a:t>600,000 원</a:t>
+                        <a:t>800,000 원</a:t>
                       </a:r>
                     </a:p>
                   </a:txBody>
@@ -6049,7 +6049,7 @@
                           </a:solidFill>
                           <a:latin typeface="맑은 고딕"/>
                         </a:rPr>
-                        <a:t>55</a:t>
+                        <a:t>50</a:t>
                       </a:r>
                     </a:p>
                   </a:txBody>
@@ -6072,7 +6072,7 @@
                           </a:solidFill>
                           <a:latin typeface="맑은 고딕"/>
                         </a:rPr>
-                        <a:t>120</a:t>
+                        <a:t>110</a:t>
                       </a:r>
                     </a:p>
                   </a:txBody>
@@ -6095,7 +6095,7 @@
                           </a:solidFill>
                           <a:latin typeface="맑은 고딕"/>
                         </a:rPr>
-                        <a:t>70</a:t>
+                        <a:t>65</a:t>
                       </a:r>
                     </a:p>
                   </a:txBody>
@@ -6118,7 +6118,7 @@
                           </a:solidFill>
                           <a:latin typeface="맑은 고딕"/>
                         </a:rPr>
-                        <a:t>55</a:t>
+                        <a:t>50</a:t>
                       </a:r>
                     </a:p>
                   </a:txBody>
@@ -6141,6 +6141,29 @@
                           </a:solidFill>
                           <a:latin typeface="맑은 고딕"/>
                         </a:rPr>
+                        <a:t>90</a:t>
+                      </a:r>
+                    </a:p>
+                  </a:txBody>
+                  <a:tcPr marL="50800" marR="50800" marT="12700" marB="12700" anchor="ctr">
+                    <a:solidFill>
+                      <a:srgbClr val="111111"/>
+                    </a:solidFill>
+                  </a:tcPr>
+                </a:tc>
+                <a:tc>
+                  <a:txBody>
+                    <a:bodyPr wrap="square"/>
+                    <a:lstStyle/>
+                    <a:p>
+                      <a:pPr algn="ctr"/>
+                      <a:r>
+                        <a:rPr sz="1100" b="1">
+                          <a:solidFill>
+                            <a:srgbClr val="FFFFFF"/>
+                          </a:solidFill>
+                          <a:latin typeface="맑은 고딕"/>
+                        </a:rPr>
                         <a:t>100</a:t>
                       </a:r>
                     </a:p>
@@ -6158,36 +6181,13 @@
                     <a:p>
                       <a:pPr algn="ctr"/>
                       <a:r>
-                        <a:rPr sz="1100" b="1">
+                        <a:rPr sz="1000" b="1">
                           <a:solidFill>
                             <a:srgbClr val="FFFFFF"/>
                           </a:solidFill>
                           <a:latin typeface="맑은 고딕"/>
                         </a:rPr>
-                        <a:t>115</a:t>
-                      </a:r>
-                    </a:p>
-                  </a:txBody>
-                  <a:tcPr marL="50800" marR="50800" marT="12700" marB="12700" anchor="ctr">
-                    <a:solidFill>
-                      <a:srgbClr val="111111"/>
-                    </a:solidFill>
-                  </a:tcPr>
-                </a:tc>
-                <a:tc>
-                  <a:txBody>
-                    <a:bodyPr wrap="square"/>
-                    <a:lstStyle/>
-                    <a:p>
-                      <a:pPr algn="ctr"/>
-                      <a:r>
-                        <a:rPr sz="1000" b="1">
-                          <a:solidFill>
-                            <a:srgbClr val="FFFFFF"/>
-                          </a:solidFill>
-                          <a:latin typeface="맑은 고딕"/>
-                        </a:rPr>
-                        <a:t>515건</a:t>
+                        <a:t>465건</a:t>
                       </a:r>
                     </a:p>
                   </a:txBody>
@@ -6819,7 +6819,7 @@
                           </a:solidFill>
                           <a:latin typeface="맑은 고딕"/>
                         </a:rPr>
-                        <a:t>68,600,000</a:t>
+                        <a:t>66,800,000</a:t>
                       </a:r>
                     </a:p>
                   </a:txBody>
@@ -7198,7 +7198,7 @@
                           </a:solidFill>
                           <a:latin typeface="맑은 고딕"/>
                         </a:rPr>
-                        <a:t>275</a:t>
+                        <a:t>225</a:t>
                       </a:r>
                     </a:p>
                   </a:txBody>
@@ -7244,7 +7244,7 @@
                           </a:solidFill>
                           <a:latin typeface="맑은 고딕"/>
                         </a:rPr>
-                        <a:t>68,750,000</a:t>
+                        <a:t>56,250,000</a:t>
                       </a:r>
                     </a:p>
                   </a:txBody>
@@ -7552,7 +7552,7 @@
                           </a:solidFill>
                           <a:latin typeface="맑은 고딕"/>
                         </a:rPr>
-                        <a:t>600,000</a:t>
+                        <a:t>800,000</a:t>
                       </a:r>
                     </a:p>
                   </a:txBody>
@@ -7575,7 +7575,7 @@
                           </a:solidFill>
                           <a:latin typeface="맑은 고딕"/>
                         </a:rPr>
-                        <a:t>5,400,000</a:t>
+                        <a:t>7,200,000</a:t>
                       </a:r>
                     </a:p>
                   </a:txBody>
@@ -7970,7 +7970,7 @@
                           </a:solidFill>
                           <a:latin typeface="맑은 고딕"/>
                         </a:rPr>
-                        <a:t>262,000,000</a:t>
+                        <a:t>249,500,000</a:t>
                       </a:r>
                     </a:p>
                   </a:txBody>
@@ -8034,7 +8034,7 @@
                           </a:solidFill>
                           <a:latin typeface="맑은 고딕"/>
                         </a:rPr>
-                        <a:t>26,200,000</a:t>
+                        <a:t>24,950,000</a:t>
                       </a:r>
                     </a:p>
                   </a:txBody>
@@ -8098,7 +8098,7 @@
                           </a:solidFill>
                           <a:latin typeface="맑은 고딕"/>
                         </a:rPr>
-                        <a:t>288,200,000</a:t>
+                        <a:t>274,450,000</a:t>
                       </a:r>
                     </a:p>
                   </a:txBody>
@@ -8142,7 +8142,7 @@
                 </a:solidFill>
                 <a:latin typeface="맑은 고딕"/>
               </a:rPr>
-              <a:t>· 프로젝트 대행료 항목 제외, 해당 예산(2,500만)은 크리에이터 나노 시딩에 반영 · EGC 콘텐츠는 건당 1,500,000원 별도 산정</a:t>
+              <a:t>· 대행료 항목 제외(나노 시딩에 반영) · 파워페이지 건당 800,000원(제작비에서 충당) · EGC 건당 1,500,000원 · 공급가액 2.5억 이내</a:t>
             </a:r>
           </a:p>
           <a:p>

--- a/proposal/올더베러_액션플랜_견적서_편집용.pptx
+++ b/proposal/올더베러_액션플랜_견적서_편집용.pptx
@@ -6819,7 +6819,7 @@
                           </a:solidFill>
                           <a:latin typeface="맑은 고딕"/>
                         </a:rPr>
-                        <a:t>66,800,000</a:t>
+                        <a:t>67,300,000</a:t>
                       </a:r>
                     </a:p>
                   </a:txBody>
@@ -7970,7 +7970,7 @@
                           </a:solidFill>
                           <a:latin typeface="맑은 고딕"/>
                         </a:rPr>
-                        <a:t>249,500,000</a:t>
+                        <a:t>250,000,000</a:t>
                       </a:r>
                     </a:p>
                   </a:txBody>
@@ -8034,7 +8034,7 @@
                           </a:solidFill>
                           <a:latin typeface="맑은 고딕"/>
                         </a:rPr>
-                        <a:t>24,950,000</a:t>
+                        <a:t>25,000,000</a:t>
                       </a:r>
                     </a:p>
                   </a:txBody>
@@ -8098,7 +8098,7 @@
                           </a:solidFill>
                           <a:latin typeface="맑은 고딕"/>
                         </a:rPr>
-                        <a:t>274,450,000</a:t>
+                        <a:t>275,000,000</a:t>
                       </a:r>
                     </a:p>
                   </a:txBody>
@@ -8142,7 +8142,7 @@
                 </a:solidFill>
                 <a:latin typeface="맑은 고딕"/>
               </a:rPr>
-              <a:t>· 대행료 항목 제외(나노 시딩에 반영) · 파워페이지 건당 800,000원(제작비에서 충당) · EGC 건당 1,500,000원 · 공급가액 2.5억 이내</a:t>
+              <a:t>· 대행료 항목 제외(나노 시딩에 반영) · 파워페이지 건당 800,000원(제작비에서 충당) · EGC 건당 1,500,000원 · 공급가액 정확히 2.5억(VAT 별도)</a:t>
             </a:r>
           </a:p>
           <a:p>
